--- a/@Materi Kuliah/Materi_Proses_Stokastik_Tingkat_Lanjut/Presentasi_Proses_Stokastik_Tingkat_Lanjut_Profesional_dari_HTML.pptx
+++ b/@Materi Kuliah/Materi_Proses_Stokastik_Tingkat_Lanjut/Presentasi_Proses_Stokastik_Tingkat_Lanjut_Profesional_dari_HTML.pptx
@@ -2,131 +2,36 @@
 <file path=ppt/presentation.xml><?xml version="1.0" encoding="utf-8"?>
 <p:presentation xmlns:p="http://schemas.openxmlformats.org/presentationml/2006/main">
   <p:sldMasterIdLst>
-    <p:sldMasterId xmlns:r="http://schemas.openxmlformats.org/officeDocument/2006/relationships" id="2147483648" r:id="Rb88a1384d2f442ab"/>
+    <p:sldMasterId xmlns:r="http://schemas.openxmlformats.org/officeDocument/2006/relationships" id="2147483648" r:id="Rc1fcb07402ce4cfc"/>
   </p:sldMasterIdLst>
   <p:notesMasterIdLst>
-    <p:notesMasterId xmlns:r="http://schemas.openxmlformats.org/officeDocument/2006/relationships" r:id="Rc8d1d1cdfc314c84"/>
+    <p:notesMasterId xmlns:r="http://schemas.openxmlformats.org/officeDocument/2006/relationships" r:id="R6024da659e2040bb"/>
   </p:notesMasterIdLst>
   <p:sldIdLst>
-    <p:sldId xmlns:r="http://schemas.openxmlformats.org/officeDocument/2006/relationships" id="256" r:id="Raf1422b4a411498e"/>
-    <p:sldId xmlns:r="http://schemas.openxmlformats.org/officeDocument/2006/relationships" id="257" r:id="R5bd4f42009ff4e12"/>
-    <p:sldId xmlns:r="http://schemas.openxmlformats.org/officeDocument/2006/relationships" id="258" r:id="R993ce92d2db24c19"/>
-    <p:sldId xmlns:r="http://schemas.openxmlformats.org/officeDocument/2006/relationships" id="259" r:id="Rd0c8641775df43fa"/>
-    <p:sldId xmlns:r="http://schemas.openxmlformats.org/officeDocument/2006/relationships" id="260" r:id="R0b70c6fc92c74940"/>
-    <p:sldId xmlns:r="http://schemas.openxmlformats.org/officeDocument/2006/relationships" id="261" r:id="Rafefe8208eca4645"/>
-    <p:sldId xmlns:r="http://schemas.openxmlformats.org/officeDocument/2006/relationships" id="262" r:id="Rd80f68438a134769"/>
-    <p:sldId xmlns:r="http://schemas.openxmlformats.org/officeDocument/2006/relationships" id="263" r:id="R51829242d2fb4cc9"/>
-    <p:sldId xmlns:r="http://schemas.openxmlformats.org/officeDocument/2006/relationships" id="264" r:id="R6cf1d3e1d86c45f5"/>
-    <p:sldId xmlns:r="http://schemas.openxmlformats.org/officeDocument/2006/relationships" id="265" r:id="R7542715b68d24ed5"/>
-    <p:sldId xmlns:r="http://schemas.openxmlformats.org/officeDocument/2006/relationships" id="266" r:id="R2071b9e933cd47b6"/>
-    <p:sldId xmlns:r="http://schemas.openxmlformats.org/officeDocument/2006/relationships" id="267" r:id="R569c61055dc74f92"/>
-    <p:sldId xmlns:r="http://schemas.openxmlformats.org/officeDocument/2006/relationships" id="268" r:id="Rcafe911c3eae4b08"/>
-    <p:sldId xmlns:r="http://schemas.openxmlformats.org/officeDocument/2006/relationships" id="269" r:id="R79618be8ce2b4412"/>
-    <p:sldId xmlns:r="http://schemas.openxmlformats.org/officeDocument/2006/relationships" id="270" r:id="R57effab7886e49e9"/>
-    <p:sldId xmlns:r="http://schemas.openxmlformats.org/officeDocument/2006/relationships" id="271" r:id="R99fd42501fbe4cbe"/>
-    <p:sldId xmlns:r="http://schemas.openxmlformats.org/officeDocument/2006/relationships" id="272" r:id="Ra19031a7e99a4cb8"/>
-    <p:sldId xmlns:r="http://schemas.openxmlformats.org/officeDocument/2006/relationships" id="273" r:id="R29b6796d57a44ff5"/>
-    <p:sldId xmlns:r="http://schemas.openxmlformats.org/officeDocument/2006/relationships" id="274" r:id="R708e47fc579942e5"/>
-    <p:sldId xmlns:r="http://schemas.openxmlformats.org/officeDocument/2006/relationships" id="275" r:id="Ra40df8ba65804a71"/>
-    <p:sldId xmlns:r="http://schemas.openxmlformats.org/officeDocument/2006/relationships" id="276" r:id="R4592a25928e74d67"/>
+    <p:sldId xmlns:r="http://schemas.openxmlformats.org/officeDocument/2006/relationships" id="256" r:id="R99bc6430dd11487e"/>
+    <p:sldId xmlns:r="http://schemas.openxmlformats.org/officeDocument/2006/relationships" id="257" r:id="R4758f096b7704009"/>
+    <p:sldId xmlns:r="http://schemas.openxmlformats.org/officeDocument/2006/relationships" id="258" r:id="R68cbb7ebc9ee4f30"/>
+    <p:sldId xmlns:r="http://schemas.openxmlformats.org/officeDocument/2006/relationships" id="259" r:id="R1b6097f6df254f57"/>
+    <p:sldId xmlns:r="http://schemas.openxmlformats.org/officeDocument/2006/relationships" id="260" r:id="Rffaf5749ec39486f"/>
+    <p:sldId xmlns:r="http://schemas.openxmlformats.org/officeDocument/2006/relationships" id="261" r:id="R3b02928520684936"/>
+    <p:sldId xmlns:r="http://schemas.openxmlformats.org/officeDocument/2006/relationships" id="262" r:id="Rfcc8cedfed1e4e6a"/>
+    <p:sldId xmlns:r="http://schemas.openxmlformats.org/officeDocument/2006/relationships" id="263" r:id="R2904c306cc034c3f"/>
+    <p:sldId xmlns:r="http://schemas.openxmlformats.org/officeDocument/2006/relationships" id="264" r:id="Ra74de159a6f74ce0"/>
+    <p:sldId xmlns:r="http://schemas.openxmlformats.org/officeDocument/2006/relationships" id="265" r:id="Rd863c28be4724e8f"/>
+    <p:sldId xmlns:r="http://schemas.openxmlformats.org/officeDocument/2006/relationships" id="266" r:id="R31f6d67ff683454f"/>
+    <p:sldId xmlns:r="http://schemas.openxmlformats.org/officeDocument/2006/relationships" id="267" r:id="R5b2664ae00f34cb0"/>
+    <p:sldId xmlns:r="http://schemas.openxmlformats.org/officeDocument/2006/relationships" id="268" r:id="R696df67e8df44b22"/>
+    <p:sldId xmlns:r="http://schemas.openxmlformats.org/officeDocument/2006/relationships" id="269" r:id="R446c264bf5e24efd"/>
+    <p:sldId xmlns:r="http://schemas.openxmlformats.org/officeDocument/2006/relationships" id="270" r:id="R979ebb79723f42bd"/>
+    <p:sldId xmlns:r="http://schemas.openxmlformats.org/officeDocument/2006/relationships" id="271" r:id="R41d302e9941e4603"/>
+    <p:sldId xmlns:r="http://schemas.openxmlformats.org/officeDocument/2006/relationships" id="272" r:id="R72c223c4faad480a"/>
+    <p:sldId xmlns:r="http://schemas.openxmlformats.org/officeDocument/2006/relationships" id="273" r:id="R341bdd84ca04451b"/>
+    <p:sldId xmlns:r="http://schemas.openxmlformats.org/officeDocument/2006/relationships" id="274" r:id="Rc8f53b31fcad4bd7"/>
+    <p:sldId xmlns:r="http://schemas.openxmlformats.org/officeDocument/2006/relationships" id="275" r:id="R94999842714649a5"/>
+    <p:sldId xmlns:r="http://schemas.openxmlformats.org/officeDocument/2006/relationships" id="276" r:id="R9963e7f742bd4983"/>
   </p:sldIdLst>
   <p:sldSz cx="12192000" cy="6858000"/>
   <p:notesSz cx="6858000" cy="9144000"/>
-  <p:defaultTextStyle>
-    <a:defPPr xmlns:a="http://schemas.openxmlformats.org/drawingml/2006/main">
-      <a:defRPr lang="en-US"/>
-    </a:defPPr>
-    <a:lvl1pPr xmlns:a="http://schemas.openxmlformats.org/drawingml/2006/main" marL="0" indent="0" algn="l" defTabSz="914400">
-      <a:defRPr sz="1800" kern="1200">
-        <a:solidFill>
-          <a:schemeClr val="tx1"/>
-        </a:solidFill>
-        <a:latin typeface="+mn-lt"/>
-        <a:ea typeface="+mn-ea"/>
-        <a:cs typeface="+mn-cs"/>
-      </a:defRPr>
-    </a:lvl1pPr>
-    <a:lvl2pPr xmlns:a="http://schemas.openxmlformats.org/drawingml/2006/main" marL="457200" indent="0" algn="l" defTabSz="914400">
-      <a:defRPr sz="1800" kern="1200">
-        <a:solidFill>
-          <a:schemeClr val="tx1"/>
-        </a:solidFill>
-        <a:latin typeface="+mn-lt"/>
-        <a:ea typeface="+mn-ea"/>
-        <a:cs typeface="+mn-cs"/>
-      </a:defRPr>
-    </a:lvl2pPr>
-    <a:lvl3pPr xmlns:a="http://schemas.openxmlformats.org/drawingml/2006/main" marL="914400" indent="0" algn="l" defTabSz="914400">
-      <a:defRPr sz="1800" kern="1200">
-        <a:solidFill>
-          <a:schemeClr val="tx1"/>
-        </a:solidFill>
-        <a:latin typeface="+mn-lt"/>
-        <a:ea typeface="+mn-ea"/>
-        <a:cs typeface="+mn-cs"/>
-      </a:defRPr>
-    </a:lvl3pPr>
-    <a:lvl4pPr xmlns:a="http://schemas.openxmlformats.org/drawingml/2006/main" marL="1371600" indent="0" algn="l" defTabSz="914400">
-      <a:defRPr sz="1800" kern="1200">
-        <a:solidFill>
-          <a:schemeClr val="tx1"/>
-        </a:solidFill>
-        <a:latin typeface="+mn-lt"/>
-        <a:ea typeface="+mn-ea"/>
-        <a:cs typeface="+mn-cs"/>
-      </a:defRPr>
-    </a:lvl4pPr>
-    <a:lvl5pPr xmlns:a="http://schemas.openxmlformats.org/drawingml/2006/main" marL="1828800" indent="0" algn="l" defTabSz="914400">
-      <a:defRPr sz="1800" kern="1200">
-        <a:solidFill>
-          <a:schemeClr val="tx1"/>
-        </a:solidFill>
-        <a:latin typeface="+mn-lt"/>
-        <a:ea typeface="+mn-ea"/>
-        <a:cs typeface="+mn-cs"/>
-      </a:defRPr>
-    </a:lvl5pPr>
-    <a:lvl6pPr xmlns:a="http://schemas.openxmlformats.org/drawingml/2006/main" marL="2286000" indent="0" algn="l" defTabSz="914400">
-      <a:defRPr sz="1800" kern="1200">
-        <a:solidFill>
-          <a:schemeClr val="tx1"/>
-        </a:solidFill>
-        <a:latin typeface="+mn-lt"/>
-        <a:ea typeface="+mn-ea"/>
-        <a:cs typeface="+mn-cs"/>
-      </a:defRPr>
-    </a:lvl6pPr>
-    <a:lvl7pPr xmlns:a="http://schemas.openxmlformats.org/drawingml/2006/main" marL="2743200" indent="0" algn="l" defTabSz="914400">
-      <a:defRPr sz="1800" kern="1200">
-        <a:solidFill>
-          <a:schemeClr val="tx1"/>
-        </a:solidFill>
-        <a:latin typeface="+mn-lt"/>
-        <a:ea typeface="+mn-ea"/>
-        <a:cs typeface="+mn-cs"/>
-      </a:defRPr>
-    </a:lvl7pPr>
-    <a:lvl8pPr xmlns:a="http://schemas.openxmlformats.org/drawingml/2006/main" marL="3200400" indent="0" algn="l" defTabSz="914400">
-      <a:defRPr sz="1800" kern="1200">
-        <a:solidFill>
-          <a:schemeClr val="tx1"/>
-        </a:solidFill>
-        <a:latin typeface="+mn-lt"/>
-        <a:ea typeface="+mn-ea"/>
-        <a:cs typeface="+mn-cs"/>
-      </a:defRPr>
-    </a:lvl8pPr>
-    <a:lvl9pPr xmlns:a="http://schemas.openxmlformats.org/drawingml/2006/main" marL="3657600" indent="0" algn="l" defTabSz="914400">
-      <a:defRPr sz="1800" kern="1200">
-        <a:solidFill>
-          <a:schemeClr val="tx1"/>
-        </a:solidFill>
-        <a:latin typeface="+mn-lt"/>
-        <a:ea typeface="+mn-ea"/>
-        <a:cs typeface="+mn-cs"/>
-      </a:defRPr>
-    </a:lvl9pPr>
-  </p:defaultTextStyle>
 </p:presentation>
 </file>
 
@@ -1453,7 +1358,26 @@
         <p:txBody>
           <a:bodyPr xmlns:a="http://schemas.openxmlformats.org/drawingml/2006/main"/>
           <a:lstStyle xmlns:a="http://schemas.openxmlformats.org/drawingml/2006/main"/>
-          <a:p xmlns:a="http://schemas.openxmlformats.org/drawingml/2006/main"/>
+          <a:p xmlns:a="http://schemas.openxmlformats.org/drawingml/2006/main">
+            <a:r>
+              <a:t>[Sources]</a:t>
+            </a:r>
+          </a:p>
+          <a:p xmlns:a="http://schemas.openxmlformats.org/drawingml/2006/main">
+            <a:r>
+              <a:t>- RPS mata kuliah Revisi AI 2026, Program Studi S2 Statistika Terapan FMIPA Universitas Padjadjaran.</a:t>
+            </a:r>
+          </a:p>
+          <a:p xmlns:a="http://schemas.openxmlformats.org/drawingml/2006/main">
+            <a:r>
+              <a:t>[/Sources]</a:t>
+            </a:r>
+          </a:p>
+          <a:p xmlns:a="http://schemas.openxmlformats.org/drawingml/2006/main">
+            <a:r>
+              <a:t>Penutup: CPL tetap. AI adalah akselerator ketercapaian CPMK/Sub-CPMK, bukan pengganti penalaran statistika. Tekankan kewajiban prompt log ringkas, sumber, kode/notebook reproducible, validasi, dan audit trail.</a:t>
+            </a:r>
+          </a:p>
         </p:txBody>
       </p:sp>
       <p:sp>
@@ -2010,8 +1934,8 @@
   </p:cSld>
   <p:clrMap bg1="lt1" tx1="dk1" bg2="lt2" tx2="dk2" accent1="accent1" accent2="accent2" accent3="accent3" accent4="accent4" accent5="accent5" accent6="accent6" hlink="hlink" folHlink="folHlink"/>
   <p:sldLayoutIdLst>
-    <p:sldLayoutId xmlns:r="http://schemas.openxmlformats.org/officeDocument/2006/relationships" id="2147483649" r:id="Re1039e8899a94e2e"/>
-    <p:sldLayoutId xmlns:r="http://schemas.openxmlformats.org/officeDocument/2006/relationships" id="2147483650" r:id="R4e7487bb204d4e16"/>
+    <p:sldLayoutId xmlns:r="http://schemas.openxmlformats.org/officeDocument/2006/relationships" id="2147483649" r:id="Ra5b09598f1fd419a"/>
+    <p:sldLayoutId xmlns:r="http://schemas.openxmlformats.org/officeDocument/2006/relationships" id="2147483650" r:id="Rc7fb8b8a573f476e"/>
   </p:sldLayoutIdLst>
   <p:hf sldNum="0" hdr="0" ftr="0" dt="0"/>
   <p:txStyles>
@@ -2577,7 +2501,7 @@
           <p:nvPr/>
         </p:nvPicPr>
         <p:blipFill>
-          <a:blip xmlns:r="http://schemas.openxmlformats.org/officeDocument/2006/relationships" xmlns:a="http://schemas.openxmlformats.org/drawingml/2006/main" r:embed="R04fef11559d34e38"/>
+          <a:blip xmlns:r="http://schemas.openxmlformats.org/officeDocument/2006/relationships" xmlns:a="http://schemas.openxmlformats.org/drawingml/2006/main" r:embed="R84685cd564824269"/>
           <a:stretch xmlns:a="http://schemas.openxmlformats.org/drawingml/2006/main">
             <a:fillRect l="0" t="0" r="0" b="0"/>
           </a:stretch>
@@ -2723,7 +2647,7 @@
           <p:nvPr/>
         </p:nvPicPr>
         <p:blipFill>
-          <a:blip xmlns:r="http://schemas.openxmlformats.org/officeDocument/2006/relationships" xmlns:a="http://schemas.openxmlformats.org/drawingml/2006/main" r:embed="Rc9b594a1ea8c4880"/>
+          <a:blip xmlns:r="http://schemas.openxmlformats.org/officeDocument/2006/relationships" xmlns:a="http://schemas.openxmlformats.org/drawingml/2006/main" r:embed="R0e6a01b8035b47b6"/>
           <a:stretch xmlns:a="http://schemas.openxmlformats.org/drawingml/2006/main">
             <a:fillRect l="0" t="0" r="0" b="0"/>
           </a:stretch>
@@ -3345,7 +3269,7 @@
           <p:nvPr/>
         </p:nvPicPr>
         <p:blipFill>
-          <a:blip xmlns:r="http://schemas.openxmlformats.org/officeDocument/2006/relationships" xmlns:a="http://schemas.openxmlformats.org/drawingml/2006/main" r:embed="Rbba937e4451245db"/>
+          <a:blip xmlns:r="http://schemas.openxmlformats.org/officeDocument/2006/relationships" xmlns:a="http://schemas.openxmlformats.org/drawingml/2006/main" r:embed="R9886833139774a0c"/>
           <a:stretch xmlns:a="http://schemas.openxmlformats.org/drawingml/2006/main">
             <a:fillRect l="0" t="0" r="0" b="0"/>
           </a:stretch>
@@ -5495,7 +5419,7 @@
           <p:nvPr/>
         </p:nvPicPr>
         <p:blipFill>
-          <a:blip xmlns:r="http://schemas.openxmlformats.org/officeDocument/2006/relationships" xmlns:a="http://schemas.openxmlformats.org/drawingml/2006/main" r:embed="R63bfe8a473c64df7"/>
+          <a:blip xmlns:r="http://schemas.openxmlformats.org/officeDocument/2006/relationships" xmlns:a="http://schemas.openxmlformats.org/drawingml/2006/main" r:embed="R76c1621dc44d4b09"/>
           <a:stretch xmlns:a="http://schemas.openxmlformats.org/drawingml/2006/main">
             <a:fillRect l="0" t="0" r="0" b="0"/>
           </a:stretch>
@@ -5774,7 +5698,7 @@
           <p:nvPr/>
         </p:nvPicPr>
         <p:blipFill>
-          <a:blip xmlns:r="http://schemas.openxmlformats.org/officeDocument/2006/relationships" xmlns:a="http://schemas.openxmlformats.org/drawingml/2006/main" r:embed="Rb1d54699cb9f4c3f"/>
+          <a:blip xmlns:r="http://schemas.openxmlformats.org/officeDocument/2006/relationships" xmlns:a="http://schemas.openxmlformats.org/drawingml/2006/main" r:embed="Rdc4603d8a4c84403"/>
           <a:stretch xmlns:a="http://schemas.openxmlformats.org/drawingml/2006/main">
             <a:fillRect l="0" t="0" r="0" b="0"/>
           </a:stretch>
@@ -7308,7 +7232,7 @@
           <p:nvPr/>
         </p:nvPicPr>
         <p:blipFill>
-          <a:blip xmlns:r="http://schemas.openxmlformats.org/officeDocument/2006/relationships" xmlns:a="http://schemas.openxmlformats.org/drawingml/2006/main" r:embed="R63a1c9b76f914ebf"/>
+          <a:blip xmlns:r="http://schemas.openxmlformats.org/officeDocument/2006/relationships" xmlns:a="http://schemas.openxmlformats.org/drawingml/2006/main" r:embed="R508c765c916542fc"/>
           <a:stretch xmlns:a="http://schemas.openxmlformats.org/drawingml/2006/main">
             <a:fillRect l="0" t="0" r="0" b="0"/>
           </a:stretch>
@@ -8477,7 +8401,7 @@
           <p:nvPr/>
         </p:nvPicPr>
         <p:blipFill>
-          <a:blip xmlns:r="http://schemas.openxmlformats.org/officeDocument/2006/relationships" xmlns:a="http://schemas.openxmlformats.org/drawingml/2006/main" r:embed="Rc33e244f82294c0a"/>
+          <a:blip xmlns:r="http://schemas.openxmlformats.org/officeDocument/2006/relationships" xmlns:a="http://schemas.openxmlformats.org/drawingml/2006/main" r:embed="R747c17613b2a4b04"/>
           <a:stretch xmlns:a="http://schemas.openxmlformats.org/drawingml/2006/main">
             <a:fillRect l="0" t="0" r="0" b="0"/>
           </a:stretch>
@@ -9704,7 +9628,7 @@
           <p:nvPr/>
         </p:nvPicPr>
         <p:blipFill>
-          <a:blip xmlns:r="http://schemas.openxmlformats.org/officeDocument/2006/relationships" xmlns:a="http://schemas.openxmlformats.org/drawingml/2006/main" r:embed="Rbd47c6d0a09d4d3f"/>
+          <a:blip xmlns:r="http://schemas.openxmlformats.org/officeDocument/2006/relationships" xmlns:a="http://schemas.openxmlformats.org/drawingml/2006/main" r:embed="Ra635427a0e2541a9"/>
           <a:stretch xmlns:a="http://schemas.openxmlformats.org/drawingml/2006/main">
             <a:fillRect l="0" t="0" r="0" b="0"/>
           </a:stretch>
@@ -10909,7 +10833,7 @@
           <p:nvPr/>
         </p:nvPicPr>
         <p:blipFill>
-          <a:blip xmlns:r="http://schemas.openxmlformats.org/officeDocument/2006/relationships" xmlns:a="http://schemas.openxmlformats.org/drawingml/2006/main" r:embed="R254d742d31fa4672"/>
+          <a:blip xmlns:r="http://schemas.openxmlformats.org/officeDocument/2006/relationships" xmlns:a="http://schemas.openxmlformats.org/drawingml/2006/main" r:embed="R0bedaaf34cbf4e07"/>
           <a:stretch xmlns:a="http://schemas.openxmlformats.org/drawingml/2006/main">
             <a:fillRect l="0" t="0" r="0" b="0"/>
           </a:stretch>
@@ -11188,7 +11112,7 @@
           <p:nvPr/>
         </p:nvPicPr>
         <p:blipFill>
-          <a:blip xmlns:r="http://schemas.openxmlformats.org/officeDocument/2006/relationships" xmlns:a="http://schemas.openxmlformats.org/drawingml/2006/main" r:embed="R0e63638804ec4d9e"/>
+          <a:blip xmlns:r="http://schemas.openxmlformats.org/officeDocument/2006/relationships" xmlns:a="http://schemas.openxmlformats.org/drawingml/2006/main" r:embed="Ra4ba3ed618044cd2"/>
           <a:stretch xmlns:a="http://schemas.openxmlformats.org/drawingml/2006/main">
             <a:fillRect l="0" t="0" r="0" b="0"/>
           </a:stretch>
@@ -12733,7 +12657,7 @@
           <p:nvPr/>
         </p:nvPicPr>
         <p:blipFill>
-          <a:blip xmlns:r="http://schemas.openxmlformats.org/officeDocument/2006/relationships" xmlns:a="http://schemas.openxmlformats.org/drawingml/2006/main" r:embed="R3b181876250f46b3"/>
+          <a:blip xmlns:r="http://schemas.openxmlformats.org/officeDocument/2006/relationships" xmlns:a="http://schemas.openxmlformats.org/drawingml/2006/main" r:embed="R16785b8996aa42b7"/>
           <a:stretch xmlns:a="http://schemas.openxmlformats.org/drawingml/2006/main">
             <a:fillRect l="0" t="0" r="0" b="0"/>
           </a:stretch>
@@ -14750,7 +14674,7 @@
           <p:nvPr/>
         </p:nvPicPr>
         <p:blipFill>
-          <a:blip xmlns:r="http://schemas.openxmlformats.org/officeDocument/2006/relationships" xmlns:a="http://schemas.openxmlformats.org/drawingml/2006/main" r:embed="R89fc478245924e77"/>
+          <a:blip xmlns:r="http://schemas.openxmlformats.org/officeDocument/2006/relationships" xmlns:a="http://schemas.openxmlformats.org/drawingml/2006/main" r:embed="R0b6bb1718fbe4350"/>
           <a:stretch xmlns:a="http://schemas.openxmlformats.org/drawingml/2006/main">
             <a:fillRect l="0" t="0" r="0" b="0"/>
           </a:stretch>
@@ -15977,7 +15901,7 @@
           <p:nvPr/>
         </p:nvPicPr>
         <p:blipFill>
-          <a:blip xmlns:r="http://schemas.openxmlformats.org/officeDocument/2006/relationships" xmlns:a="http://schemas.openxmlformats.org/drawingml/2006/main" r:embed="R4933bd145b6c4e79"/>
+          <a:blip xmlns:r="http://schemas.openxmlformats.org/officeDocument/2006/relationships" xmlns:a="http://schemas.openxmlformats.org/drawingml/2006/main" r:embed="R202f1190df0e4acc"/>
           <a:stretch xmlns:a="http://schemas.openxmlformats.org/drawingml/2006/main">
             <a:fillRect l="0" t="0" r="0" b="0"/>
           </a:stretch>
@@ -17118,7 +17042,7 @@
           <p:nvPr/>
         </p:nvPicPr>
         <p:blipFill>
-          <a:blip xmlns:r="http://schemas.openxmlformats.org/officeDocument/2006/relationships" xmlns:a="http://schemas.openxmlformats.org/drawingml/2006/main" r:embed="R873f4fd588a94c42"/>
+          <a:blip xmlns:r="http://schemas.openxmlformats.org/officeDocument/2006/relationships" xmlns:a="http://schemas.openxmlformats.org/drawingml/2006/main" r:embed="Rd0b38d3ca19b4e10"/>
           <a:stretch xmlns:a="http://schemas.openxmlformats.org/drawingml/2006/main">
             <a:fillRect l="0" t="0" r="0" b="0"/>
           </a:stretch>
@@ -18583,7 +18507,7 @@
           <p:nvPr/>
         </p:nvPicPr>
         <p:blipFill>
-          <a:blip xmlns:r="http://schemas.openxmlformats.org/officeDocument/2006/relationships" xmlns:a="http://schemas.openxmlformats.org/drawingml/2006/main" r:embed="Rd29df7f22b3549b2"/>
+          <a:blip xmlns:r="http://schemas.openxmlformats.org/officeDocument/2006/relationships" xmlns:a="http://schemas.openxmlformats.org/drawingml/2006/main" r:embed="R7e9616972aa74a0b"/>
           <a:stretch xmlns:a="http://schemas.openxmlformats.org/drawingml/2006/main">
             <a:fillRect l="0" t="0" r="0" b="0"/>
           </a:stretch>
@@ -18729,7 +18653,7 @@
           <p:nvPr/>
         </p:nvPicPr>
         <p:blipFill>
-          <a:blip xmlns:r="http://schemas.openxmlformats.org/officeDocument/2006/relationships" xmlns:a="http://schemas.openxmlformats.org/drawingml/2006/main" r:embed="R3e1ce3ce5f49419b"/>
+          <a:blip xmlns:r="http://schemas.openxmlformats.org/officeDocument/2006/relationships" xmlns:a="http://schemas.openxmlformats.org/drawingml/2006/main" r:embed="R2619e218b8c14650"/>
           <a:stretch xmlns:a="http://schemas.openxmlformats.org/drawingml/2006/main">
             <a:fillRect l="0" t="0" r="0" b="0"/>
           </a:stretch>
@@ -18833,7 +18757,7 @@
                 <a:ea typeface="Aptos Display"/>
                 <a:cs typeface="Aptos Display"/>
               </a:rPr>
-              <a:t>Dari data menuju</a:t>
+              <a:t>AI mempercepat proses,</a:t>
             </a:r>
           </a:p>
           <a:p xmlns:a="http://schemas.openxmlformats.org/drawingml/2006/main">
@@ -18849,7 +18773,7 @@
                 <a:ea typeface="Aptos Display"/>
                 <a:cs typeface="Aptos Display"/>
               </a:rPr>
-              <a:t>keputusan yang dapat diuji</a:t>
+              <a:t>penalaran tetap memimpin</a:t>
             </a:r>
           </a:p>
         </p:txBody>
@@ -18916,7 +18840,7 @@
         </p:spPr>
         <p:txBody>
           <a:bodyPr xmlns:a="http://schemas.openxmlformats.org/drawingml/2006/main" wrap="square" lIns="635" tIns="635" rIns="635" bIns="635" anchor="t">
-            <a:normAutofit fontScale="100000"/>
+            <a:normAutofit fontScale="93620"/>
           </a:bodyPr>
           <a:lstStyle xmlns:a="http://schemas.openxmlformats.org/drawingml/2006/main"/>
           <a:p xmlns:a="http://schemas.openxmlformats.org/drawingml/2006/main">
@@ -18932,7 +18856,7 @@
                 <a:ea typeface="Aptos"/>
                 <a:cs typeface="Aptos"/>
               </a:rPr>
-              <a:t>Proses Stokastik Lanjut menghubungkan teori, data, metode, validasi, dan komunikasi untuk menghasilkan keputusan yang sahih, dapat direplikasi, dan bertanggung jawab.</a:t>
+              <a:t>Proses Stokastik Tingkat Lanjut memadukan teori, data, komputasi, validasi, dan komunikasi. AI mempercepat eksplorasi dan pemeriksaan awal; mahasiswa tetap memverifikasi asumsi, kode, hasil numerik, ketidakpastian, sumber, dan dampak sebelum mengambil keputusan.</a:t>
             </a:r>
           </a:p>
         </p:txBody>
@@ -19102,7 +19026,7 @@
           <p:nvPr/>
         </p:nvPicPr>
         <p:blipFill>
-          <a:blip xmlns:r="http://schemas.openxmlformats.org/officeDocument/2006/relationships" xmlns:a="http://schemas.openxmlformats.org/drawingml/2006/main" r:embed="R767633b80d9e4485"/>
+          <a:blip xmlns:r="http://schemas.openxmlformats.org/officeDocument/2006/relationships" xmlns:a="http://schemas.openxmlformats.org/drawingml/2006/main" r:embed="Ree4b7909ade74e5c"/>
           <a:stretch xmlns:a="http://schemas.openxmlformats.org/drawingml/2006/main">
             <a:fillRect l="0" t="0" r="0" b="0"/>
           </a:stretch>
@@ -20233,7 +20157,7 @@
           <p:nvPr/>
         </p:nvPicPr>
         <p:blipFill>
-          <a:blip xmlns:r="http://schemas.openxmlformats.org/officeDocument/2006/relationships" xmlns:a="http://schemas.openxmlformats.org/drawingml/2006/main" r:embed="R63a9fd9485cb4133"/>
+          <a:blip xmlns:r="http://schemas.openxmlformats.org/officeDocument/2006/relationships" xmlns:a="http://schemas.openxmlformats.org/drawingml/2006/main" r:embed="R6c8e4475184d4017"/>
           <a:stretch xmlns:a="http://schemas.openxmlformats.org/drawingml/2006/main">
             <a:fillRect l="0" t="0" r="0" b="0"/>
           </a:stretch>
@@ -22337,7 +22261,7 @@
           <p:nvPr/>
         </p:nvPicPr>
         <p:blipFill>
-          <a:blip xmlns:r="http://schemas.openxmlformats.org/officeDocument/2006/relationships" xmlns:a="http://schemas.openxmlformats.org/drawingml/2006/main" r:embed="R296af42279fe40a8"/>
+          <a:blip xmlns:r="http://schemas.openxmlformats.org/officeDocument/2006/relationships" xmlns:a="http://schemas.openxmlformats.org/drawingml/2006/main" r:embed="R2c9572ddad00429d"/>
           <a:stretch xmlns:a="http://schemas.openxmlformats.org/drawingml/2006/main">
             <a:fillRect l="0" t="0" r="0" b="0"/>
           </a:stretch>
@@ -23619,7 +23543,7 @@
           <p:nvPr/>
         </p:nvPicPr>
         <p:blipFill>
-          <a:blip xmlns:r="http://schemas.openxmlformats.org/officeDocument/2006/relationships" xmlns:a="http://schemas.openxmlformats.org/drawingml/2006/main" r:embed="R2cdc2fa1c2d448e4"/>
+          <a:blip xmlns:r="http://schemas.openxmlformats.org/officeDocument/2006/relationships" xmlns:a="http://schemas.openxmlformats.org/drawingml/2006/main" r:embed="Rbfda05340c524cb9"/>
           <a:stretch xmlns:a="http://schemas.openxmlformats.org/drawingml/2006/main">
             <a:fillRect l="0" t="0" r="0" b="0"/>
           </a:stretch>
@@ -23898,7 +23822,7 @@
           <p:nvPr/>
         </p:nvPicPr>
         <p:blipFill>
-          <a:blip xmlns:r="http://schemas.openxmlformats.org/officeDocument/2006/relationships" xmlns:a="http://schemas.openxmlformats.org/drawingml/2006/main" r:embed="Rd5dfdd633c504b37"/>
+          <a:blip xmlns:r="http://schemas.openxmlformats.org/officeDocument/2006/relationships" xmlns:a="http://schemas.openxmlformats.org/drawingml/2006/main" r:embed="Raaabbeef065e4f4c"/>
           <a:stretch xmlns:a="http://schemas.openxmlformats.org/drawingml/2006/main">
             <a:fillRect l="0" t="0" r="0" b="0"/>
           </a:stretch>
@@ -25978,7 +25902,7 @@
           <p:nvPr/>
         </p:nvPicPr>
         <p:blipFill>
-          <a:blip xmlns:r="http://schemas.openxmlformats.org/officeDocument/2006/relationships" xmlns:a="http://schemas.openxmlformats.org/drawingml/2006/main" r:embed="R325b86d8b2a744c6"/>
+          <a:blip xmlns:r="http://schemas.openxmlformats.org/officeDocument/2006/relationships" xmlns:a="http://schemas.openxmlformats.org/drawingml/2006/main" r:embed="Ra2a804e930c54a8f"/>
           <a:stretch xmlns:a="http://schemas.openxmlformats.org/drawingml/2006/main">
             <a:fillRect l="0" t="0" r="0" b="0"/>
           </a:stretch>
@@ -27391,7 +27315,7 @@
           <p:nvPr/>
         </p:nvPicPr>
         <p:blipFill>
-          <a:blip xmlns:r="http://schemas.openxmlformats.org/officeDocument/2006/relationships" xmlns:a="http://schemas.openxmlformats.org/drawingml/2006/main" r:embed="Rfb0279e005814ec0"/>
+          <a:blip xmlns:r="http://schemas.openxmlformats.org/officeDocument/2006/relationships" xmlns:a="http://schemas.openxmlformats.org/drawingml/2006/main" r:embed="Rdb291d6a1dd14c04"/>
           <a:stretch xmlns:a="http://schemas.openxmlformats.org/drawingml/2006/main">
             <a:fillRect l="0" t="0" r="0" b="0"/>
           </a:stretch>
